--- a/CalendarioAgo25/Ejercicios/E2_VLAN/Ejer2_VLANs.pptx
+++ b/CalendarioAgo25/Ejercicios/E2_VLAN/Ejer2_VLANs.pptx
@@ -136,6 +136,43 @@
     </p:ext>
   </p:extLst>
 </p:presentation>
+</file>
+
+<file path=ppt/changesInfos/changesInfo1.xml><?xml version="1.0" encoding="utf-8"?>
+<pc:chgInfo xmlns:a="http://schemas.openxmlformats.org/drawingml/2006/main" xmlns:r="http://schemas.openxmlformats.org/officeDocument/2006/relationships" xmlns:ac="http://schemas.microsoft.com/office/drawing/2013/main/command" xmlns:pc="http://schemas.microsoft.com/office/powerpoint/2013/main/command">
+  <pc:docChgLst>
+    <pc:chgData name="Lizethe Pérez Fuertes" userId="4ae9ef87-2a7d-42f8-8dfa-0a501a9e2ff4" providerId="ADAL" clId="{FDDD45CB-1330-4033-A842-3D2746AFF7C7}"/>
+    <pc:docChg chg="modSld">
+      <pc:chgData name="Lizethe Pérez Fuertes" userId="4ae9ef87-2a7d-42f8-8dfa-0a501a9e2ff4" providerId="ADAL" clId="{FDDD45CB-1330-4033-A842-3D2746AFF7C7}" dt="2025-09-24T14:34:50.114" v="3" actId="6549"/>
+      <pc:docMkLst>
+        <pc:docMk/>
+      </pc:docMkLst>
+      <pc:sldChg chg="modSp mod">
+        <pc:chgData name="Lizethe Pérez Fuertes" userId="4ae9ef87-2a7d-42f8-8dfa-0a501a9e2ff4" providerId="ADAL" clId="{FDDD45CB-1330-4033-A842-3D2746AFF7C7}" dt="2025-09-24T14:34:50.114" v="3" actId="6549"/>
+        <pc:sldMkLst>
+          <pc:docMk/>
+          <pc:sldMk cId="1366278812" sldId="350"/>
+        </pc:sldMkLst>
+        <pc:spChg chg="mod">
+          <ac:chgData name="Lizethe Pérez Fuertes" userId="4ae9ef87-2a7d-42f8-8dfa-0a501a9e2ff4" providerId="ADAL" clId="{FDDD45CB-1330-4033-A842-3D2746AFF7C7}" dt="2025-09-24T14:34:16.293" v="1" actId="6549"/>
+          <ac:spMkLst>
+            <pc:docMk/>
+            <pc:sldMk cId="1366278812" sldId="350"/>
+            <ac:spMk id="5" creationId="{9D99F20F-671A-41D1-8D5A-1D575E79056A}"/>
+          </ac:spMkLst>
+        </pc:spChg>
+        <pc:spChg chg="mod">
+          <ac:chgData name="Lizethe Pérez Fuertes" userId="4ae9ef87-2a7d-42f8-8dfa-0a501a9e2ff4" providerId="ADAL" clId="{FDDD45CB-1330-4033-A842-3D2746AFF7C7}" dt="2025-09-24T14:34:50.114" v="3" actId="6549"/>
+          <ac:spMkLst>
+            <pc:docMk/>
+            <pc:sldMk cId="1366278812" sldId="350"/>
+            <ac:spMk id="7" creationId="{9FEB6DB2-BC53-41ED-8E85-70CA00123834}"/>
+          </ac:spMkLst>
+        </pc:spChg>
+      </pc:sldChg>
+    </pc:docChg>
+  </pc:docChgLst>
+</pc:chgInfo>
 </file>
 
 <file path=ppt/notesMasters/notesMaster1.xml><?xml version="1.0" encoding="utf-8"?>
@@ -1187,7 +1224,7 @@
           <a:p>
             <a:fld id="{1D8BD707-D9CF-40AE-B4C6-C98DA3205C09}" type="datetimeFigureOut">
               <a:rPr lang="en-US"/>
-              <a:t>5/6/2025</a:t>
+              <a:t>9/24/2025</a:t>
             </a:fld>
             <a:endParaRPr lang="en-US" dirty="0"/>
           </a:p>
@@ -1219,7 +1256,7 @@
           </a:lstStyle>
           <a:p>
             <a:fld id="{B6F15528-21DE-4FAA-801E-634DDDAF4B2B}" type="slidenum">
-              <a:t>‹#›</a:t>
+              <a:t>‹Nº›</a:t>
             </a:fld>
             <a:endParaRPr dirty="0"/>
           </a:p>
@@ -1364,7 +1401,7 @@
           <a:p>
             <a:fld id="{1D8BD707-D9CF-40AE-B4C6-C98DA3205C09}" type="datetimeFigureOut">
               <a:rPr lang="en-US"/>
-              <a:t>5/6/2025</a:t>
+              <a:t>9/24/2025</a:t>
             </a:fld>
             <a:endParaRPr lang="en-US" dirty="0"/>
           </a:p>
@@ -1396,7 +1433,7 @@
           </a:lstStyle>
           <a:p>
             <a:fld id="{B6F15528-21DE-4FAA-801E-634DDDAF4B2B}" type="slidenum">
-              <a:t>‹#›</a:t>
+              <a:t>‹Nº›</a:t>
             </a:fld>
             <a:endParaRPr dirty="0"/>
           </a:p>
@@ -1578,7 +1615,7 @@
           <a:p>
             <a:fld id="{1D8BD707-D9CF-40AE-B4C6-C98DA3205C09}" type="datetimeFigureOut">
               <a:rPr lang="en-US"/>
-              <a:t>5/6/2025</a:t>
+              <a:t>9/24/2025</a:t>
             </a:fld>
             <a:endParaRPr lang="en-US" dirty="0"/>
           </a:p>
@@ -1610,7 +1647,7 @@
           </a:lstStyle>
           <a:p>
             <a:fld id="{B6F15528-21DE-4FAA-801E-634DDDAF4B2B}" type="slidenum">
-              <a:t>‹#›</a:t>
+              <a:t>‹Nº›</a:t>
             </a:fld>
             <a:endParaRPr dirty="0"/>
           </a:p>
@@ -1726,7 +1763,7 @@
           <a:p>
             <a:fld id="{1D8BD707-D9CF-40AE-B4C6-C98DA3205C09}" type="datetimeFigureOut">
               <a:rPr lang="en-US"/>
-              <a:t>5/6/2025</a:t>
+              <a:t>9/24/2025</a:t>
             </a:fld>
             <a:endParaRPr lang="en-US" dirty="0"/>
           </a:p>
@@ -1758,7 +1795,7 @@
           </a:lstStyle>
           <a:p>
             <a:fld id="{B6F15528-21DE-4FAA-801E-634DDDAF4B2B}" type="slidenum">
-              <a:t>‹#›</a:t>
+              <a:t>‹Nº›</a:t>
             </a:fld>
             <a:endParaRPr dirty="0"/>
           </a:p>
@@ -1882,7 +1919,7 @@
           <a:p>
             <a:fld id="{1D8BD707-D9CF-40AE-B4C6-C98DA3205C09}" type="datetimeFigureOut">
               <a:rPr lang="en-US"/>
-              <a:t>5/6/2025</a:t>
+              <a:t>9/24/2025</a:t>
             </a:fld>
             <a:endParaRPr lang="en-US" dirty="0"/>
           </a:p>
@@ -1914,7 +1951,7 @@
           </a:lstStyle>
           <a:p>
             <a:fld id="{B6F15528-21DE-4FAA-801E-634DDDAF4B2B}" type="slidenum">
-              <a:t>‹#›</a:t>
+              <a:t>‹Nº›</a:t>
             </a:fld>
             <a:endParaRPr dirty="0"/>
           </a:p>
@@ -1967,7 +2004,7 @@
           <a:p>
             <a:fld id="{5E75A0DC-66C6-4CEC-A5EB-F8C97CEC3796}" type="datetimeFigureOut">
               <a:rPr lang="es-MX" smtClean="0"/>
-              <a:t>06/05/2025</a:t>
+              <a:t>24/09/2025</a:t>
             </a:fld>
             <a:endParaRPr lang="es-MX" dirty="0"/>
           </a:p>
@@ -2019,7 +2056,7 @@
           <a:p>
             <a:fld id="{C077EE1E-7A06-4E7F-9AFB-189FC69B7B0C}" type="slidenum">
               <a:rPr lang="es-MX" smtClean="0"/>
-              <a:t>‹#›</a:t>
+              <a:t>‹Nº›</a:t>
             </a:fld>
             <a:endParaRPr lang="es-MX" dirty="0"/>
           </a:p>
@@ -2224,7 +2261,7 @@
           <a:p>
             <a:fld id="{5E75A0DC-66C6-4CEC-A5EB-F8C97CEC3796}" type="datetimeFigureOut">
               <a:rPr lang="es-MX" smtClean="0"/>
-              <a:t>06/05/2025</a:t>
+              <a:t>24/09/2025</a:t>
             </a:fld>
             <a:endParaRPr lang="es-MX" dirty="0"/>
           </a:p>
@@ -2276,7 +2313,7 @@
           <a:p>
             <a:fld id="{C077EE1E-7A06-4E7F-9AFB-189FC69B7B0C}" type="slidenum">
               <a:rPr lang="es-MX" smtClean="0"/>
-              <a:t>‹#›</a:t>
+              <a:t>‹Nº›</a:t>
             </a:fld>
             <a:endParaRPr lang="es-MX" dirty="0"/>
           </a:p>
@@ -2474,7 +2511,7 @@
           <a:p>
             <a:fld id="{1D8BD707-D9CF-40AE-B4C6-C98DA3205C09}" type="datetimeFigureOut">
               <a:rPr lang="en-US"/>
-              <a:t>5/6/2025</a:t>
+              <a:t>9/24/2025</a:t>
             </a:fld>
             <a:endParaRPr lang="en-US" dirty="0"/>
           </a:p>
@@ -2516,7 +2553,7 @@
           </a:lstStyle>
           <a:p>
             <a:fld id="{B6F15528-21DE-4FAA-801E-634DDDAF4B2B}" type="slidenum">
-              <a:t>‹#›</a:t>
+              <a:t>‹Nº›</a:t>
             </a:fld>
             <a:endParaRPr dirty="0"/>
           </a:p>
@@ -3842,7 +3879,7 @@
                 <a:latin typeface="Arial" panose="020B0604020202020204" pitchFamily="34" charset="0"/>
                 <a:cs typeface="Arial" panose="020B0604020202020204" pitchFamily="34" charset="0"/>
               </a:rPr>
-              <a:t>s0/0/0</a:t>
+              <a:t>s0/0/1</a:t>
             </a:r>
             <a:r>
               <a:rPr lang="es-ES_tradnl" sz="1600" dirty="0">
@@ -4074,7 +4111,7 @@
                 <a:ea typeface="Calibri" panose="020F0502020204030204" pitchFamily="34" charset="0"/>
                 <a:cs typeface="Arial" panose="020B0604020202020204" pitchFamily="34" charset="0"/>
               </a:rPr>
-              <a:t>nuestra interface de salida (s0/0/0) </a:t>
+              <a:t>nuestra interface de salida (s0/0/1) </a:t>
             </a:r>
             <a:r>
               <a:rPr lang="es-ES" sz="1400" dirty="0">
